--- a/ped-tbi-etco2-teaching.pptx
+++ b/ped-tbi-etco2-teaching.pptx
@@ -3567,34 +3567,7 @@
       </p:sp>
       <p:sp>
         <p:nvSpPr>
-          <p:cNvPr id="3" name="Shape 1"/>
-          <p:cNvSpPr/>
-          <p:nvPr/>
-        </p:nvSpPr>
-        <p:spPr>
-          <a:xfrm>
-            <a:off x="-2194560" y="-2377440"/>
-            <a:ext cx="8686800" cy="6583680"/>
-          </a:xfrm>
-          <a:prstGeom prst="ellipse">
-            <a:avLst/>
-          </a:prstGeom>
-          <a:solidFill>
-            <a:srgbClr val="E2404C">
-              <a:alpha val="18000"/>
-            </a:srgbClr>
-          </a:solidFill>
-          <a:ln w="12700">
-            <a:solidFill>
-              <a:srgbClr val="E2404C"/>
-            </a:solidFill>
-            <a:prstDash val="solid"/>
-          </a:ln>
-        </p:spPr>
-      </p:sp>
-      <p:sp>
-        <p:nvSpPr>
-          <p:cNvPr id="4" name="Text 2"/>
+          <p:cNvPr id="3" name="Text 1"/>
           <p:cNvSpPr/>
           <p:nvPr/>
         </p:nvSpPr>
@@ -3633,7 +3606,7 @@
       </p:sp>
       <p:sp>
         <p:nvSpPr>
-          <p:cNvPr id="5" name="Text 3"/>
+          <p:cNvPr id="4" name="Text 2"/>
           <p:cNvSpPr/>
           <p:nvPr/>
         </p:nvSpPr>
@@ -3695,7 +3668,7 @@
       </p:sp>
       <p:sp>
         <p:nvSpPr>
-          <p:cNvPr id="6" name="Text 4"/>
+          <p:cNvPr id="5" name="Text 3"/>
           <p:cNvSpPr/>
           <p:nvPr/>
         </p:nvSpPr>
@@ -3734,7 +3707,7 @@
       </p:sp>
       <p:sp>
         <p:nvSpPr>
-          <p:cNvPr id="7" name="Shape 5"/>
+          <p:cNvPr id="6" name="Shape 4"/>
           <p:cNvSpPr/>
           <p:nvPr/>
         </p:nvSpPr>
@@ -3757,7 +3730,7 @@
       </p:sp>
       <p:sp>
         <p:nvSpPr>
-          <p:cNvPr id="8" name="Text 6"/>
+          <p:cNvPr id="7" name="Text 5"/>
           <p:cNvSpPr/>
           <p:nvPr/>
         </p:nvSpPr>
@@ -4076,7 +4049,7 @@
         </p:nvSpPr>
         <p:spPr>
           <a:xfrm>
-            <a:off x="566928" y="1481328"/>
+            <a:off x="566928" y="1645920"/>
             <a:ext cx="5368900" cy="1920240"/>
           </a:xfrm>
           <a:prstGeom prst="roundRect">
@@ -4103,7 +4076,7 @@
         </p:nvSpPr>
         <p:spPr>
           <a:xfrm>
-            <a:off x="768096" y="1627632"/>
+            <a:off x="768096" y="1792224"/>
             <a:ext cx="4966564" cy="292608"/>
           </a:xfrm>
           <a:prstGeom prst="rect">
@@ -4142,7 +4115,7 @@
         </p:nvSpPr>
         <p:spPr>
           <a:xfrm>
-            <a:off x="786384" y="1975104"/>
+            <a:off x="786384" y="2139696"/>
             <a:ext cx="4948276" cy="1298448"/>
           </a:xfrm>
           <a:prstGeom prst="rect">
@@ -4295,7 +4268,7 @@
         </p:nvSpPr>
         <p:spPr>
           <a:xfrm>
-            <a:off x="6255868" y="1481328"/>
+            <a:off x="6255868" y="1645920"/>
             <a:ext cx="5368900" cy="1920240"/>
           </a:xfrm>
           <a:prstGeom prst="roundRect">
@@ -4322,7 +4295,7 @@
         </p:nvSpPr>
         <p:spPr>
           <a:xfrm>
-            <a:off x="6457036" y="1627632"/>
+            <a:off x="6457036" y="1792224"/>
             <a:ext cx="4966564" cy="292608"/>
           </a:xfrm>
           <a:prstGeom prst="rect">
@@ -4361,7 +4334,7 @@
         </p:nvSpPr>
         <p:spPr>
           <a:xfrm>
-            <a:off x="6475324" y="1975104"/>
+            <a:off x="6475324" y="2139696"/>
             <a:ext cx="4948276" cy="1298448"/>
           </a:xfrm>
           <a:prstGeom prst="rect">
@@ -4514,7 +4487,7 @@
         </p:nvSpPr>
         <p:spPr>
           <a:xfrm>
-            <a:off x="566928" y="3584448"/>
+            <a:off x="566928" y="3749040"/>
             <a:ext cx="11057839" cy="914400"/>
           </a:xfrm>
           <a:prstGeom prst="roundRect">
@@ -4541,7 +4514,7 @@
         </p:nvSpPr>
         <p:spPr>
           <a:xfrm>
-            <a:off x="749808" y="3739896"/>
+            <a:off x="749808" y="3904488"/>
             <a:ext cx="566928" cy="274320"/>
           </a:xfrm>
           <a:prstGeom prst="roundRect">
@@ -4568,7 +4541,7 @@
         </p:nvSpPr>
         <p:spPr>
           <a:xfrm>
-            <a:off x="749808" y="3739896"/>
+            <a:off x="749808" y="3904488"/>
             <a:ext cx="566928" cy="274320"/>
           </a:xfrm>
           <a:prstGeom prst="rect">
@@ -4607,7 +4580,7 @@
         </p:nvSpPr>
         <p:spPr>
           <a:xfrm>
-            <a:off x="1408176" y="3703320"/>
+            <a:off x="1408176" y="3867912"/>
             <a:ext cx="10015423" cy="676656"/>
           </a:xfrm>
           <a:prstGeom prst="rect">
@@ -4717,7 +4690,7 @@
         </p:nvSpPr>
         <p:spPr>
           <a:xfrm>
-            <a:off x="566928" y="4681728"/>
+            <a:off x="566928" y="4846320"/>
             <a:ext cx="11057839" cy="310896"/>
           </a:xfrm>
           <a:prstGeom prst="rect">
@@ -5525,7 +5498,7 @@
           </p:nvPr>
         </p:nvGraphicFramePr>
         <p:xfrm>
-          <a:off x="566928" y="1481328"/>
+          <a:off x="566928" y="1645920"/>
           <a:ext cx="11057839" cy="914400"/>
         </p:xfrm>
         <a:graphic>
@@ -6579,12 +6552,12 @@
         </p:nvSpPr>
         <p:spPr>
           <a:xfrm>
-            <a:off x="566928" y="3813048"/>
-            <a:ext cx="11057839" cy="1170432"/>
+            <a:off x="566928" y="4151376"/>
+            <a:ext cx="11057839" cy="1133856"/>
           </a:xfrm>
           <a:prstGeom prst="roundRect">
             <a:avLst>
-              <a:gd name="adj" fmla="val 7031"/>
+              <a:gd name="adj" fmla="val 7258"/>
             </a:avLst>
           </a:prstGeom>
           <a:solidFill>
@@ -6606,7 +6579,7 @@
         </p:nvSpPr>
         <p:spPr>
           <a:xfrm>
-            <a:off x="768096" y="3959352"/>
+            <a:off x="768096" y="4297680"/>
             <a:ext cx="10655503" cy="292608"/>
           </a:xfrm>
           <a:prstGeom prst="rect">
@@ -6645,8 +6618,8 @@
         </p:nvSpPr>
         <p:spPr>
           <a:xfrm>
-            <a:off x="786384" y="4297680"/>
-            <a:ext cx="10618927" cy="621792"/>
+            <a:off x="786384" y="4626864"/>
+            <a:ext cx="10618927" cy="603504"/>
           </a:xfrm>
           <a:prstGeom prst="rect">
             <a:avLst/>
@@ -6755,7 +6728,7 @@
         </p:nvSpPr>
         <p:spPr>
           <a:xfrm>
-            <a:off x="566928" y="5138928"/>
+            <a:off x="566928" y="5431536"/>
             <a:ext cx="11057839" cy="310896"/>
           </a:xfrm>
           <a:prstGeom prst="rect">
@@ -7089,7 +7062,7 @@
         </p:nvSpPr>
         <p:spPr>
           <a:xfrm>
-            <a:off x="566928" y="1481328"/>
+            <a:off x="566928" y="1645920"/>
             <a:ext cx="32004" cy="777240"/>
           </a:xfrm>
           <a:prstGeom prst="rect">
@@ -7114,7 +7087,7 @@
         </p:nvSpPr>
         <p:spPr>
           <a:xfrm>
-            <a:off x="786384" y="1481328"/>
+            <a:off x="786384" y="1645920"/>
             <a:ext cx="10838383" cy="777240"/>
           </a:xfrm>
           <a:prstGeom prst="rect">
@@ -7190,7 +7163,7 @@
         </p:nvSpPr>
         <p:spPr>
           <a:xfrm>
-            <a:off x="566928" y="2441448"/>
+            <a:off x="566928" y="2606040"/>
             <a:ext cx="5368900" cy="1600200"/>
           </a:xfrm>
           <a:prstGeom prst="roundRect">
@@ -7217,7 +7190,7 @@
         </p:nvSpPr>
         <p:spPr>
           <a:xfrm>
-            <a:off x="768096" y="2587752"/>
+            <a:off x="768096" y="2752344"/>
             <a:ext cx="4966564" cy="292608"/>
           </a:xfrm>
           <a:prstGeom prst="rect">
@@ -7256,7 +7229,7 @@
         </p:nvSpPr>
         <p:spPr>
           <a:xfrm>
-            <a:off x="786384" y="2935224"/>
+            <a:off x="786384" y="3099816"/>
             <a:ext cx="4948276" cy="978408"/>
           </a:xfrm>
           <a:prstGeom prst="rect">
@@ -7358,7 +7331,7 @@
         </p:nvSpPr>
         <p:spPr>
           <a:xfrm>
-            <a:off x="6255868" y="2441448"/>
+            <a:off x="6255868" y="2606040"/>
             <a:ext cx="5368900" cy="1600200"/>
           </a:xfrm>
           <a:prstGeom prst="roundRect">
@@ -7385,7 +7358,7 @@
         </p:nvSpPr>
         <p:spPr>
           <a:xfrm>
-            <a:off x="6457036" y="2587752"/>
+            <a:off x="6457036" y="2752344"/>
             <a:ext cx="4966564" cy="292608"/>
           </a:xfrm>
           <a:prstGeom prst="rect">
@@ -7424,7 +7397,7 @@
         </p:nvSpPr>
         <p:spPr>
           <a:xfrm>
-            <a:off x="6475324" y="2926080"/>
+            <a:off x="6475324" y="3090672"/>
             <a:ext cx="4929988" cy="1005840"/>
           </a:xfrm>
           <a:prstGeom prst="rect">
@@ -7534,7 +7507,7 @@
         </p:nvSpPr>
         <p:spPr>
           <a:xfrm>
-            <a:off x="566928" y="4224528"/>
+            <a:off x="566928" y="4389120"/>
             <a:ext cx="11057839" cy="804672"/>
           </a:xfrm>
           <a:prstGeom prst="roundRect">
@@ -7561,7 +7534,7 @@
         </p:nvSpPr>
         <p:spPr>
           <a:xfrm>
-            <a:off x="749808" y="4379976"/>
+            <a:off x="749808" y="4544568"/>
             <a:ext cx="566928" cy="274320"/>
           </a:xfrm>
           <a:prstGeom prst="roundRect">
@@ -7588,7 +7561,7 @@
         </p:nvSpPr>
         <p:spPr>
           <a:xfrm>
-            <a:off x="749808" y="4379976"/>
+            <a:off x="749808" y="4544568"/>
             <a:ext cx="566928" cy="274320"/>
           </a:xfrm>
           <a:prstGeom prst="rect">
@@ -7627,7 +7600,7 @@
         </p:nvSpPr>
         <p:spPr>
           <a:xfrm>
-            <a:off x="1408176" y="4343400"/>
+            <a:off x="1408176" y="4507992"/>
             <a:ext cx="10015423" cy="566928"/>
           </a:xfrm>
           <a:prstGeom prst="rect">
@@ -7703,7 +7676,7 @@
         </p:nvSpPr>
         <p:spPr>
           <a:xfrm>
-            <a:off x="566928" y="5175504"/>
+            <a:off x="566928" y="5340096"/>
             <a:ext cx="11057839" cy="310896"/>
           </a:xfrm>
           <a:prstGeom prst="rect">
@@ -8037,7 +8010,7 @@
         </p:nvSpPr>
         <p:spPr>
           <a:xfrm>
-            <a:off x="566928" y="1481328"/>
+            <a:off x="566928" y="1645920"/>
             <a:ext cx="3472586" cy="2148840"/>
           </a:xfrm>
           <a:prstGeom prst="roundRect">
@@ -8064,7 +8037,7 @@
         </p:nvSpPr>
         <p:spPr>
           <a:xfrm>
-            <a:off x="768096" y="1627632"/>
+            <a:off x="768096" y="1792224"/>
             <a:ext cx="3070250" cy="219456"/>
           </a:xfrm>
           <a:prstGeom prst="rect">
@@ -8103,7 +8076,7 @@
         </p:nvSpPr>
         <p:spPr>
           <a:xfrm>
-            <a:off x="768096" y="1865376"/>
+            <a:off x="768096" y="2029968"/>
             <a:ext cx="3070250" cy="292608"/>
           </a:xfrm>
           <a:prstGeom prst="rect">
@@ -8142,7 +8115,7 @@
         </p:nvSpPr>
         <p:spPr>
           <a:xfrm>
-            <a:off x="768096" y="2212848"/>
+            <a:off x="768096" y="2377440"/>
             <a:ext cx="3070250" cy="1289304"/>
           </a:xfrm>
           <a:prstGeom prst="rect">
@@ -8184,7 +8157,7 @@
         </p:nvSpPr>
         <p:spPr>
           <a:xfrm>
-            <a:off x="4359554" y="1481328"/>
+            <a:off x="4359554" y="1645920"/>
             <a:ext cx="3472586" cy="2148840"/>
           </a:xfrm>
           <a:prstGeom prst="roundRect">
@@ -8211,7 +8184,7 @@
         </p:nvSpPr>
         <p:spPr>
           <a:xfrm>
-            <a:off x="4560722" y="1627632"/>
+            <a:off x="4560722" y="1792224"/>
             <a:ext cx="3070250" cy="219456"/>
           </a:xfrm>
           <a:prstGeom prst="rect">
@@ -8250,7 +8223,7 @@
         </p:nvSpPr>
         <p:spPr>
           <a:xfrm>
-            <a:off x="4560722" y="1865376"/>
+            <a:off x="4560722" y="2029968"/>
             <a:ext cx="3070250" cy="292608"/>
           </a:xfrm>
           <a:prstGeom prst="rect">
@@ -8289,7 +8262,7 @@
         </p:nvSpPr>
         <p:spPr>
           <a:xfrm>
-            <a:off x="4560722" y="2212848"/>
+            <a:off x="4560722" y="2377440"/>
             <a:ext cx="3070250" cy="1289304"/>
           </a:xfrm>
           <a:prstGeom prst="rect">
@@ -8331,7 +8304,7 @@
         </p:nvSpPr>
         <p:spPr>
           <a:xfrm>
-            <a:off x="8152181" y="1481328"/>
+            <a:off x="8152181" y="1645920"/>
             <a:ext cx="3472586" cy="2148840"/>
           </a:xfrm>
           <a:prstGeom prst="roundRect">
@@ -8358,7 +8331,7 @@
         </p:nvSpPr>
         <p:spPr>
           <a:xfrm>
-            <a:off x="8353349" y="1627632"/>
+            <a:off x="8353349" y="1792224"/>
             <a:ext cx="3070250" cy="219456"/>
           </a:xfrm>
           <a:prstGeom prst="rect">
@@ -8397,7 +8370,7 @@
         </p:nvSpPr>
         <p:spPr>
           <a:xfrm>
-            <a:off x="8353349" y="1865376"/>
+            <a:off x="8353349" y="2029968"/>
             <a:ext cx="3070250" cy="292608"/>
           </a:xfrm>
           <a:prstGeom prst="rect">
@@ -8436,7 +8409,7 @@
         </p:nvSpPr>
         <p:spPr>
           <a:xfrm>
-            <a:off x="8353349" y="2212848"/>
+            <a:off x="8353349" y="2377440"/>
             <a:ext cx="3070250" cy="1289304"/>
           </a:xfrm>
           <a:prstGeom prst="rect">
@@ -8478,7 +8451,7 @@
         </p:nvSpPr>
         <p:spPr>
           <a:xfrm>
-            <a:off x="566928" y="3813048"/>
+            <a:off x="566928" y="3977640"/>
             <a:ext cx="11057839" cy="960120"/>
           </a:xfrm>
           <a:prstGeom prst="roundRect">
@@ -8505,7 +8478,7 @@
         </p:nvSpPr>
         <p:spPr>
           <a:xfrm>
-            <a:off x="786384" y="3922776"/>
+            <a:off x="786384" y="4087368"/>
             <a:ext cx="10618927" cy="740664"/>
           </a:xfrm>
           <a:prstGeom prst="rect">
@@ -8598,7 +8571,7 @@
         </p:nvSpPr>
         <p:spPr>
           <a:xfrm>
-            <a:off x="566928" y="4956048"/>
+            <a:off x="566928" y="5120640"/>
             <a:ext cx="11057839" cy="310896"/>
           </a:xfrm>
           <a:prstGeom prst="rect">
@@ -8891,7 +8864,7 @@
         </p:nvSpPr>
         <p:spPr>
           <a:xfrm>
-            <a:off x="566928" y="1481328"/>
+            <a:off x="566928" y="1645920"/>
             <a:ext cx="5368900" cy="2103120"/>
           </a:xfrm>
           <a:prstGeom prst="roundRect">
@@ -8918,7 +8891,7 @@
         </p:nvSpPr>
         <p:spPr>
           <a:xfrm>
-            <a:off x="768096" y="1627632"/>
+            <a:off x="768096" y="1792224"/>
             <a:ext cx="4966564" cy="292608"/>
           </a:xfrm>
           <a:prstGeom prst="rect">
@@ -8957,7 +8930,7 @@
         </p:nvSpPr>
         <p:spPr>
           <a:xfrm>
-            <a:off x="786384" y="1975104"/>
+            <a:off x="786384" y="2139696"/>
             <a:ext cx="4948276" cy="1481328"/>
           </a:xfrm>
           <a:prstGeom prst="rect">
@@ -9127,7 +9100,7 @@
         </p:nvSpPr>
         <p:spPr>
           <a:xfrm>
-            <a:off x="6255868" y="1481328"/>
+            <a:off x="6255868" y="1645920"/>
             <a:ext cx="5368900" cy="2103120"/>
           </a:xfrm>
           <a:prstGeom prst="roundRect">
@@ -9154,7 +9127,7 @@
         </p:nvSpPr>
         <p:spPr>
           <a:xfrm>
-            <a:off x="6457036" y="1627632"/>
+            <a:off x="6457036" y="1792224"/>
             <a:ext cx="4966564" cy="292608"/>
           </a:xfrm>
           <a:prstGeom prst="rect">
@@ -9193,7 +9166,7 @@
         </p:nvSpPr>
         <p:spPr>
           <a:xfrm>
-            <a:off x="6475324" y="2048256"/>
+            <a:off x="6475324" y="2212848"/>
             <a:ext cx="4929988" cy="1463040"/>
           </a:xfrm>
           <a:prstGeom prst="rect">
@@ -9355,7 +9328,7 @@
         </p:nvSpPr>
         <p:spPr>
           <a:xfrm>
-            <a:off x="566928" y="3767328"/>
+            <a:off x="566928" y="3931920"/>
             <a:ext cx="11057839" cy="868680"/>
           </a:xfrm>
           <a:prstGeom prst="roundRect">
@@ -9382,7 +9355,7 @@
         </p:nvSpPr>
         <p:spPr>
           <a:xfrm>
-            <a:off x="749808" y="3922776"/>
+            <a:off x="749808" y="4087368"/>
             <a:ext cx="566928" cy="274320"/>
           </a:xfrm>
           <a:prstGeom prst="roundRect">
@@ -9409,7 +9382,7 @@
         </p:nvSpPr>
         <p:spPr>
           <a:xfrm>
-            <a:off x="749808" y="3922776"/>
+            <a:off x="749808" y="4087368"/>
             <a:ext cx="566928" cy="274320"/>
           </a:xfrm>
           <a:prstGeom prst="rect">
@@ -9448,7 +9421,7 @@
         </p:nvSpPr>
         <p:spPr>
           <a:xfrm>
-            <a:off x="1408176" y="3886200"/>
+            <a:off x="1408176" y="4050792"/>
             <a:ext cx="10015423" cy="630936"/>
           </a:xfrm>
           <a:prstGeom prst="rect">
@@ -9758,7 +9731,7 @@
           </p:nvPr>
         </p:nvGraphicFramePr>
         <p:xfrm>
-          <a:off x="566928" y="1481328"/>
+          <a:off x="566928" y="1645920"/>
           <a:ext cx="11057839" cy="914400"/>
         </p:xfrm>
         <a:graphic>
@@ -11427,7 +11400,7 @@
         </p:nvSpPr>
         <p:spPr>
           <a:xfrm>
-            <a:off x="566928" y="3721608"/>
+            <a:off x="566928" y="4187952"/>
             <a:ext cx="11057839" cy="219456"/>
           </a:xfrm>
           <a:prstGeom prst="rect">
@@ -11466,12 +11439,12 @@
         </p:nvSpPr>
         <p:spPr>
           <a:xfrm>
-            <a:off x="566928" y="4059936"/>
-            <a:ext cx="11057839" cy="960120"/>
+            <a:off x="566928" y="4498848"/>
+            <a:ext cx="11057839" cy="914400"/>
           </a:xfrm>
           <a:prstGeom prst="roundRect">
             <a:avLst>
-              <a:gd name="adj" fmla="val 6667"/>
+              <a:gd name="adj" fmla="val 7000"/>
             </a:avLst>
           </a:prstGeom>
           <a:solidFill>
@@ -11493,8 +11466,8 @@
         </p:nvSpPr>
         <p:spPr>
           <a:xfrm>
-            <a:off x="786384" y="4169664"/>
-            <a:ext cx="10618927" cy="740664"/>
+            <a:off x="786384" y="4608576"/>
+            <a:ext cx="10618927" cy="694944"/>
           </a:xfrm>
           <a:prstGeom prst="rect">
             <a:avLst/>
@@ -11569,7 +11542,7 @@
         </p:nvSpPr>
         <p:spPr>
           <a:xfrm>
-            <a:off x="566928" y="5184648"/>
+            <a:off x="566928" y="5559552"/>
             <a:ext cx="11057839" cy="310896"/>
           </a:xfrm>
           <a:prstGeom prst="rect">
@@ -11862,7 +11835,7 @@
         </p:nvSpPr>
         <p:spPr>
           <a:xfrm>
-            <a:off x="566928" y="1481328"/>
+            <a:off x="566928" y="1645920"/>
             <a:ext cx="3472586" cy="1600200"/>
           </a:xfrm>
           <a:prstGeom prst="roundRect">
@@ -11889,7 +11862,7 @@
         </p:nvSpPr>
         <p:spPr>
           <a:xfrm>
-            <a:off x="768096" y="1627632"/>
+            <a:off x="768096" y="1792224"/>
             <a:ext cx="3070250" cy="219456"/>
           </a:xfrm>
           <a:prstGeom prst="rect">
@@ -11928,7 +11901,7 @@
         </p:nvSpPr>
         <p:spPr>
           <a:xfrm>
-            <a:off x="768096" y="1865376"/>
+            <a:off x="768096" y="2029968"/>
             <a:ext cx="3070250" cy="292608"/>
           </a:xfrm>
           <a:prstGeom prst="rect">
@@ -11967,7 +11940,7 @@
         </p:nvSpPr>
         <p:spPr>
           <a:xfrm>
-            <a:off x="768096" y="2212848"/>
+            <a:off x="768096" y="2377440"/>
             <a:ext cx="3070250" cy="740664"/>
           </a:xfrm>
           <a:prstGeom prst="rect">
@@ -12009,7 +11982,7 @@
         </p:nvSpPr>
         <p:spPr>
           <a:xfrm>
-            <a:off x="4359554" y="1481328"/>
+            <a:off x="4359554" y="1645920"/>
             <a:ext cx="3472586" cy="1600200"/>
           </a:xfrm>
           <a:prstGeom prst="roundRect">
@@ -12036,7 +12009,7 @@
         </p:nvSpPr>
         <p:spPr>
           <a:xfrm>
-            <a:off x="4560722" y="1627632"/>
+            <a:off x="4560722" y="1792224"/>
             <a:ext cx="3070250" cy="219456"/>
           </a:xfrm>
           <a:prstGeom prst="rect">
@@ -12075,7 +12048,7 @@
         </p:nvSpPr>
         <p:spPr>
           <a:xfrm>
-            <a:off x="4560722" y="1865376"/>
+            <a:off x="4560722" y="2029968"/>
             <a:ext cx="3070250" cy="292608"/>
           </a:xfrm>
           <a:prstGeom prst="rect">
@@ -12114,7 +12087,7 @@
         </p:nvSpPr>
         <p:spPr>
           <a:xfrm>
-            <a:off x="4560722" y="2212848"/>
+            <a:off x="4560722" y="2377440"/>
             <a:ext cx="3070250" cy="740664"/>
           </a:xfrm>
           <a:prstGeom prst="rect">
@@ -12156,7 +12129,7 @@
         </p:nvSpPr>
         <p:spPr>
           <a:xfrm>
-            <a:off x="8152181" y="1481328"/>
+            <a:off x="8152181" y="1645920"/>
             <a:ext cx="3472586" cy="1600200"/>
           </a:xfrm>
           <a:prstGeom prst="roundRect">
@@ -12183,7 +12156,7 @@
         </p:nvSpPr>
         <p:spPr>
           <a:xfrm>
-            <a:off x="8353349" y="1627632"/>
+            <a:off x="8353349" y="1792224"/>
             <a:ext cx="3070250" cy="219456"/>
           </a:xfrm>
           <a:prstGeom prst="rect">
@@ -12222,7 +12195,7 @@
         </p:nvSpPr>
         <p:spPr>
           <a:xfrm>
-            <a:off x="8353349" y="1865376"/>
+            <a:off x="8353349" y="2029968"/>
             <a:ext cx="3070250" cy="292608"/>
           </a:xfrm>
           <a:prstGeom prst="rect">
@@ -12261,7 +12234,7 @@
         </p:nvSpPr>
         <p:spPr>
           <a:xfrm>
-            <a:off x="8353349" y="2212848"/>
+            <a:off x="8353349" y="2377440"/>
             <a:ext cx="3070250" cy="740664"/>
           </a:xfrm>
           <a:prstGeom prst="rect">
@@ -12303,7 +12276,7 @@
         </p:nvSpPr>
         <p:spPr>
           <a:xfrm>
-            <a:off x="566928" y="3264408"/>
+            <a:off x="566928" y="3429000"/>
             <a:ext cx="11057839" cy="914400"/>
           </a:xfrm>
           <a:prstGeom prst="roundRect">
@@ -12330,7 +12303,7 @@
         </p:nvSpPr>
         <p:spPr>
           <a:xfrm>
-            <a:off x="749808" y="3419856"/>
+            <a:off x="749808" y="3584448"/>
             <a:ext cx="566928" cy="274320"/>
           </a:xfrm>
           <a:prstGeom prst="roundRect">
@@ -12357,7 +12330,7 @@
         </p:nvSpPr>
         <p:spPr>
           <a:xfrm>
-            <a:off x="749808" y="3419856"/>
+            <a:off x="749808" y="3584448"/>
             <a:ext cx="566928" cy="274320"/>
           </a:xfrm>
           <a:prstGeom prst="rect">
@@ -12396,7 +12369,7 @@
         </p:nvSpPr>
         <p:spPr>
           <a:xfrm>
-            <a:off x="1408176" y="3383280"/>
+            <a:off x="1408176" y="3547872"/>
             <a:ext cx="10015423" cy="676656"/>
           </a:xfrm>
           <a:prstGeom prst="rect">
@@ -12506,7 +12479,7 @@
         </p:nvSpPr>
         <p:spPr>
           <a:xfrm>
-            <a:off x="566928" y="4361688"/>
+            <a:off x="566928" y="4526280"/>
             <a:ext cx="11057839" cy="777240"/>
           </a:xfrm>
           <a:prstGeom prst="roundRect">
@@ -12533,7 +12506,7 @@
         </p:nvSpPr>
         <p:spPr>
           <a:xfrm>
-            <a:off x="786384" y="4471416"/>
+            <a:off x="786384" y="4636008"/>
             <a:ext cx="10618927" cy="557784"/>
           </a:xfrm>
           <a:prstGeom prst="rect">
@@ -13086,7 +13059,7 @@
         <p:spPr>
           <a:xfrm>
             <a:off x="566928" y="6038013"/>
-            <a:ext cx="11057839" cy="548640"/>
+            <a:ext cx="11057839" cy="365760"/>
           </a:xfrm>
           <a:prstGeom prst="rect">
             <a:avLst/>
@@ -13395,7 +13368,7 @@
         </p:nvSpPr>
         <p:spPr>
           <a:xfrm>
-            <a:off x="566928" y="1481328"/>
+            <a:off x="566928" y="1645920"/>
             <a:ext cx="3472586" cy="1371600"/>
           </a:xfrm>
           <a:prstGeom prst="roundRect">
@@ -13422,7 +13395,7 @@
         </p:nvSpPr>
         <p:spPr>
           <a:xfrm>
-            <a:off x="768096" y="1627632"/>
+            <a:off x="768096" y="1792224"/>
             <a:ext cx="3070250" cy="292608"/>
           </a:xfrm>
           <a:prstGeom prst="rect">
@@ -13461,7 +13434,7 @@
         </p:nvSpPr>
         <p:spPr>
           <a:xfrm>
-            <a:off x="768096" y="1975104"/>
+            <a:off x="768096" y="2139696"/>
             <a:ext cx="3070250" cy="749808"/>
           </a:xfrm>
           <a:prstGeom prst="rect">
@@ -13503,7 +13476,7 @@
         </p:nvSpPr>
         <p:spPr>
           <a:xfrm>
-            <a:off x="4359554" y="1481328"/>
+            <a:off x="4359554" y="1645920"/>
             <a:ext cx="3472586" cy="1371600"/>
           </a:xfrm>
           <a:prstGeom prst="roundRect">
@@ -13530,7 +13503,7 @@
         </p:nvSpPr>
         <p:spPr>
           <a:xfrm>
-            <a:off x="4560722" y="1627632"/>
+            <a:off x="4560722" y="1792224"/>
             <a:ext cx="3070250" cy="292608"/>
           </a:xfrm>
           <a:prstGeom prst="rect">
@@ -13569,7 +13542,7 @@
         </p:nvSpPr>
         <p:spPr>
           <a:xfrm>
-            <a:off x="4560722" y="1975104"/>
+            <a:off x="4560722" y="2139696"/>
             <a:ext cx="3070250" cy="749808"/>
           </a:xfrm>
           <a:prstGeom prst="rect">
@@ -13611,7 +13584,7 @@
         </p:nvSpPr>
         <p:spPr>
           <a:xfrm>
-            <a:off x="8152181" y="1481328"/>
+            <a:off x="8152181" y="1645920"/>
             <a:ext cx="3472586" cy="1371600"/>
           </a:xfrm>
           <a:prstGeom prst="roundRect">
@@ -13638,7 +13611,7 @@
         </p:nvSpPr>
         <p:spPr>
           <a:xfrm>
-            <a:off x="8353349" y="1627632"/>
+            <a:off x="8353349" y="1792224"/>
             <a:ext cx="3070250" cy="292608"/>
           </a:xfrm>
           <a:prstGeom prst="rect">
@@ -13677,7 +13650,7 @@
         </p:nvSpPr>
         <p:spPr>
           <a:xfrm>
-            <a:off x="8353349" y="1975104"/>
+            <a:off x="8353349" y="2139696"/>
             <a:ext cx="3070250" cy="749808"/>
           </a:xfrm>
           <a:prstGeom prst="rect">
@@ -13719,7 +13692,7 @@
         </p:nvSpPr>
         <p:spPr>
           <a:xfrm>
-            <a:off x="566928" y="3035808"/>
+            <a:off x="566928" y="3200400"/>
             <a:ext cx="11057839" cy="1170432"/>
           </a:xfrm>
           <a:prstGeom prst="roundRect">
@@ -13746,7 +13719,7 @@
         </p:nvSpPr>
         <p:spPr>
           <a:xfrm>
-            <a:off x="768096" y="3182112"/>
+            <a:off x="768096" y="3346704"/>
             <a:ext cx="10655503" cy="292608"/>
           </a:xfrm>
           <a:prstGeom prst="rect">
@@ -13785,7 +13758,7 @@
         </p:nvSpPr>
         <p:spPr>
           <a:xfrm>
-            <a:off x="786384" y="3511296"/>
+            <a:off x="786384" y="3675888"/>
             <a:ext cx="10618927" cy="621792"/>
           </a:xfrm>
           <a:prstGeom prst="rect">
@@ -13878,7 +13851,7 @@
         </p:nvSpPr>
         <p:spPr>
           <a:xfrm>
-            <a:off x="566928" y="4389120"/>
+            <a:off x="566928" y="4553712"/>
             <a:ext cx="11057839" cy="841248"/>
           </a:xfrm>
           <a:prstGeom prst="roundRect">
@@ -13905,7 +13878,7 @@
         </p:nvSpPr>
         <p:spPr>
           <a:xfrm>
-            <a:off x="749808" y="4544568"/>
+            <a:off x="749808" y="4709160"/>
             <a:ext cx="566928" cy="274320"/>
           </a:xfrm>
           <a:prstGeom prst="roundRect">
@@ -13932,7 +13905,7 @@
         </p:nvSpPr>
         <p:spPr>
           <a:xfrm>
-            <a:off x="749808" y="4544568"/>
+            <a:off x="749808" y="4709160"/>
             <a:ext cx="566928" cy="274320"/>
           </a:xfrm>
           <a:prstGeom prst="rect">
@@ -13971,7 +13944,7 @@
         </p:nvSpPr>
         <p:spPr>
           <a:xfrm>
-            <a:off x="1408176" y="4507992"/>
+            <a:off x="1408176" y="4672584"/>
             <a:ext cx="10015423" cy="603504"/>
           </a:xfrm>
           <a:prstGeom prst="rect">
@@ -14274,7 +14247,7 @@
         </p:nvSpPr>
         <p:spPr>
           <a:xfrm>
-            <a:off x="566928" y="1481328"/>
+            <a:off x="566928" y="1645920"/>
             <a:ext cx="3533546" cy="1627632"/>
           </a:xfrm>
           <a:prstGeom prst="roundRect">
@@ -14301,7 +14274,7 @@
         </p:nvSpPr>
         <p:spPr>
           <a:xfrm>
-            <a:off x="566928" y="1572768"/>
+            <a:off x="566928" y="1737360"/>
             <a:ext cx="3533546" cy="670560"/>
           </a:xfrm>
           <a:prstGeom prst="rect">
@@ -14340,7 +14313,7 @@
         </p:nvSpPr>
         <p:spPr>
           <a:xfrm>
-            <a:off x="658368" y="2261616"/>
+            <a:off x="658368" y="2426208"/>
             <a:ext cx="3350666" cy="755904"/>
           </a:xfrm>
           <a:prstGeom prst="rect">
@@ -14396,7 +14369,7 @@
         </p:nvSpPr>
         <p:spPr>
           <a:xfrm>
-            <a:off x="4329074" y="1481328"/>
+            <a:off x="4329074" y="1645920"/>
             <a:ext cx="3533546" cy="1627632"/>
           </a:xfrm>
           <a:prstGeom prst="roundRect">
@@ -14423,7 +14396,7 @@
         </p:nvSpPr>
         <p:spPr>
           <a:xfrm>
-            <a:off x="4329074" y="1572768"/>
+            <a:off x="4329074" y="1737360"/>
             <a:ext cx="3533546" cy="670560"/>
           </a:xfrm>
           <a:prstGeom prst="rect">
@@ -14462,7 +14435,7 @@
         </p:nvSpPr>
         <p:spPr>
           <a:xfrm>
-            <a:off x="4420514" y="2261616"/>
+            <a:off x="4420514" y="2426208"/>
             <a:ext cx="3350666" cy="755904"/>
           </a:xfrm>
           <a:prstGeom prst="rect">
@@ -14518,7 +14491,7 @@
         </p:nvSpPr>
         <p:spPr>
           <a:xfrm>
-            <a:off x="8091221" y="1481328"/>
+            <a:off x="8091221" y="1645920"/>
             <a:ext cx="3533546" cy="1627632"/>
           </a:xfrm>
           <a:prstGeom prst="roundRect">
@@ -14545,7 +14518,7 @@
         </p:nvSpPr>
         <p:spPr>
           <a:xfrm>
-            <a:off x="8091221" y="1572768"/>
+            <a:off x="8091221" y="1737360"/>
             <a:ext cx="3533546" cy="670560"/>
           </a:xfrm>
           <a:prstGeom prst="rect">
@@ -14584,7 +14557,7 @@
         </p:nvSpPr>
         <p:spPr>
           <a:xfrm>
-            <a:off x="8182661" y="2261616"/>
+            <a:off x="8182661" y="2426208"/>
             <a:ext cx="3350666" cy="755904"/>
           </a:xfrm>
           <a:prstGeom prst="rect">
@@ -14640,12 +14613,12 @@
         </p:nvSpPr>
         <p:spPr>
           <a:xfrm>
-            <a:off x="566928" y="3273552"/>
-            <a:ext cx="11057839" cy="1243584"/>
+            <a:off x="566928" y="3438144"/>
+            <a:ext cx="11057839" cy="1078992"/>
           </a:xfrm>
           <a:prstGeom prst="roundRect">
             <a:avLst>
-              <a:gd name="adj" fmla="val 6618"/>
+              <a:gd name="adj" fmla="val 7627"/>
             </a:avLst>
           </a:prstGeom>
           <a:solidFill>
@@ -14667,7 +14640,7 @@
         </p:nvSpPr>
         <p:spPr>
           <a:xfrm>
-            <a:off x="768096" y="3419856"/>
+            <a:off x="768096" y="3584448"/>
             <a:ext cx="10655503" cy="219456"/>
           </a:xfrm>
           <a:prstGeom prst="rect">
@@ -14706,7 +14679,7 @@
         </p:nvSpPr>
         <p:spPr>
           <a:xfrm>
-            <a:off x="786384" y="3566160"/>
+            <a:off x="786384" y="3730752"/>
             <a:ext cx="10618927" cy="868680"/>
           </a:xfrm>
           <a:prstGeom prst="rect">
@@ -14799,7 +14772,7 @@
         </p:nvSpPr>
         <p:spPr>
           <a:xfrm>
-            <a:off x="566928" y="4681728"/>
+            <a:off x="566928" y="4700016"/>
             <a:ext cx="11057839" cy="786384"/>
           </a:xfrm>
           <a:prstGeom prst="roundRect">
@@ -14826,7 +14799,7 @@
         </p:nvSpPr>
         <p:spPr>
           <a:xfrm>
-            <a:off x="749808" y="4837176"/>
+            <a:off x="749808" y="4855464"/>
             <a:ext cx="566928" cy="274320"/>
           </a:xfrm>
           <a:prstGeom prst="roundRect">
@@ -14853,7 +14826,7 @@
         </p:nvSpPr>
         <p:spPr>
           <a:xfrm>
-            <a:off x="749808" y="4837176"/>
+            <a:off x="749808" y="4855464"/>
             <a:ext cx="566928" cy="274320"/>
           </a:xfrm>
           <a:prstGeom prst="rect">
@@ -14892,7 +14865,7 @@
         </p:nvSpPr>
         <p:spPr>
           <a:xfrm>
-            <a:off x="1408176" y="4800600"/>
+            <a:off x="1408176" y="4818888"/>
             <a:ext cx="10015423" cy="548640"/>
           </a:xfrm>
           <a:prstGeom prst="rect">
@@ -15202,7 +15175,7 @@
           </p:nvPr>
         </p:nvGraphicFramePr>
         <p:xfrm>
-          <a:off x="566928" y="1481328"/>
+          <a:off x="566928" y="1645920"/>
           <a:ext cx="6309360" cy="914400"/>
         </p:xfrm>
         <a:graphic>
@@ -16462,7 +16435,7 @@
         </p:nvSpPr>
         <p:spPr>
           <a:xfrm>
-            <a:off x="566928" y="3639312"/>
+            <a:off x="566928" y="3803904"/>
             <a:ext cx="11057839" cy="237744"/>
           </a:xfrm>
           <a:prstGeom prst="rect">
@@ -16501,7 +16474,7 @@
         </p:nvSpPr>
         <p:spPr>
           <a:xfrm>
-            <a:off x="7196328" y="1481328"/>
+            <a:off x="7196328" y="1645920"/>
             <a:ext cx="4428439" cy="2103120"/>
           </a:xfrm>
           <a:prstGeom prst="roundRect">
@@ -16528,7 +16501,7 @@
         </p:nvSpPr>
         <p:spPr>
           <a:xfrm>
-            <a:off x="7397496" y="1627632"/>
+            <a:off x="7397496" y="1792224"/>
             <a:ext cx="4026103" cy="292608"/>
           </a:xfrm>
           <a:prstGeom prst="rect">
@@ -16567,7 +16540,7 @@
         </p:nvSpPr>
         <p:spPr>
           <a:xfrm>
-            <a:off x="7415784" y="2029968"/>
+            <a:off x="7415784" y="2194560"/>
             <a:ext cx="3989527" cy="1417320"/>
           </a:xfrm>
           <a:prstGeom prst="rect">
@@ -16780,7 +16753,7 @@
         </p:nvSpPr>
         <p:spPr>
           <a:xfrm>
-            <a:off x="566928" y="3968496"/>
+            <a:off x="566928" y="4133088"/>
             <a:ext cx="11057839" cy="1005840"/>
           </a:xfrm>
           <a:prstGeom prst="roundRect">
@@ -16807,7 +16780,7 @@
         </p:nvSpPr>
         <p:spPr>
           <a:xfrm>
-            <a:off x="786384" y="4078224"/>
+            <a:off x="786384" y="4242816"/>
             <a:ext cx="10618927" cy="786384"/>
           </a:xfrm>
           <a:prstGeom prst="rect">
@@ -17036,7 +17009,7 @@
         </p:nvSpPr>
         <p:spPr>
           <a:xfrm>
-            <a:off x="566928" y="5084064"/>
+            <a:off x="566928" y="5248656"/>
             <a:ext cx="11057839" cy="548640"/>
           </a:xfrm>
           <a:prstGeom prst="rect">
@@ -17387,7 +17360,7 @@
         </p:nvSpPr>
         <p:spPr>
           <a:xfrm>
-            <a:off x="566928" y="1618488"/>
+            <a:off x="566928" y="1783080"/>
             <a:ext cx="5368900" cy="2148840"/>
           </a:xfrm>
           <a:prstGeom prst="roundRect">
@@ -17414,7 +17387,7 @@
         </p:nvSpPr>
         <p:spPr>
           <a:xfrm>
-            <a:off x="768096" y="1764792"/>
+            <a:off x="768096" y="1929384"/>
             <a:ext cx="4966564" cy="292608"/>
           </a:xfrm>
           <a:prstGeom prst="rect">
@@ -17453,7 +17426,7 @@
         </p:nvSpPr>
         <p:spPr>
           <a:xfrm>
-            <a:off x="786384" y="2112264"/>
+            <a:off x="786384" y="2276856"/>
             <a:ext cx="4948276" cy="1527048"/>
           </a:xfrm>
           <a:prstGeom prst="rect">
@@ -17589,7 +17562,7 @@
         </p:nvSpPr>
         <p:spPr>
           <a:xfrm>
-            <a:off x="6255868" y="1618488"/>
+            <a:off x="6255868" y="1783080"/>
             <a:ext cx="5368900" cy="2148840"/>
           </a:xfrm>
           <a:prstGeom prst="roundRect">
@@ -17616,7 +17589,7 @@
         </p:nvSpPr>
         <p:spPr>
           <a:xfrm>
-            <a:off x="6457036" y="1764792"/>
+            <a:off x="6457036" y="1929384"/>
             <a:ext cx="4966564" cy="292608"/>
           </a:xfrm>
           <a:prstGeom prst="rect">
@@ -17655,7 +17628,7 @@
         </p:nvSpPr>
         <p:spPr>
           <a:xfrm>
-            <a:off x="6475324" y="2112264"/>
+            <a:off x="6475324" y="2276856"/>
             <a:ext cx="4948276" cy="1527048"/>
           </a:xfrm>
           <a:prstGeom prst="rect">
@@ -17774,7 +17747,7 @@
         </p:nvSpPr>
         <p:spPr>
           <a:xfrm>
-            <a:off x="566928" y="3995928"/>
+            <a:off x="566928" y="4160520"/>
             <a:ext cx="11057839" cy="960120"/>
           </a:xfrm>
           <a:prstGeom prst="roundRect">
@@ -17801,7 +17774,7 @@
         </p:nvSpPr>
         <p:spPr>
           <a:xfrm>
-            <a:off x="786384" y="4105656"/>
+            <a:off x="786384" y="4270248"/>
             <a:ext cx="10618927" cy="740664"/>
           </a:xfrm>
           <a:prstGeom prst="rect">
@@ -18155,7 +18128,7 @@
         </p:nvSpPr>
         <p:spPr>
           <a:xfrm>
-            <a:off x="566928" y="1481328"/>
+            <a:off x="566928" y="1645920"/>
             <a:ext cx="5368900" cy="2057400"/>
           </a:xfrm>
           <a:prstGeom prst="roundRect">
@@ -18182,7 +18155,7 @@
         </p:nvSpPr>
         <p:spPr>
           <a:xfrm>
-            <a:off x="768096" y="1627632"/>
+            <a:off x="768096" y="1792224"/>
             <a:ext cx="4966564" cy="292608"/>
           </a:xfrm>
           <a:prstGeom prst="rect">
@@ -18221,7 +18194,7 @@
         </p:nvSpPr>
         <p:spPr>
           <a:xfrm>
-            <a:off x="786384" y="1975104"/>
+            <a:off x="786384" y="2139696"/>
             <a:ext cx="4948276" cy="1435608"/>
           </a:xfrm>
           <a:prstGeom prst="rect">
@@ -18357,7 +18330,7 @@
         </p:nvSpPr>
         <p:spPr>
           <a:xfrm>
-            <a:off x="6255868" y="1481328"/>
+            <a:off x="6255868" y="1645920"/>
             <a:ext cx="5368900" cy="2057400"/>
           </a:xfrm>
           <a:prstGeom prst="roundRect">
@@ -18384,7 +18357,7 @@
         </p:nvSpPr>
         <p:spPr>
           <a:xfrm>
-            <a:off x="6457036" y="1627632"/>
+            <a:off x="6457036" y="1792224"/>
             <a:ext cx="4966564" cy="292608"/>
           </a:xfrm>
           <a:prstGeom prst="rect">
@@ -18423,7 +18396,7 @@
         </p:nvSpPr>
         <p:spPr>
           <a:xfrm>
-            <a:off x="6475324" y="1975104"/>
+            <a:off x="6475324" y="2139696"/>
             <a:ext cx="4948276" cy="1435608"/>
           </a:xfrm>
           <a:prstGeom prst="rect">
@@ -18508,7 +18481,7 @@
         </p:nvSpPr>
         <p:spPr>
           <a:xfrm>
-            <a:off x="566928" y="3721608"/>
+            <a:off x="566928" y="3886200"/>
             <a:ext cx="11057839" cy="777240"/>
           </a:xfrm>
           <a:prstGeom prst="roundRect">
@@ -18535,7 +18508,7 @@
         </p:nvSpPr>
         <p:spPr>
           <a:xfrm>
-            <a:off x="749808" y="3877056"/>
+            <a:off x="749808" y="4041648"/>
             <a:ext cx="566928" cy="274320"/>
           </a:xfrm>
           <a:prstGeom prst="roundRect">
@@ -18562,7 +18535,7 @@
         </p:nvSpPr>
         <p:spPr>
           <a:xfrm>
-            <a:off x="749808" y="3877056"/>
+            <a:off x="749808" y="4041648"/>
             <a:ext cx="566928" cy="274320"/>
           </a:xfrm>
           <a:prstGeom prst="rect">
@@ -18601,7 +18574,7 @@
         </p:nvSpPr>
         <p:spPr>
           <a:xfrm>
-            <a:off x="1408176" y="3840480"/>
+            <a:off x="1408176" y="4005072"/>
             <a:ext cx="10015423" cy="539496"/>
           </a:xfrm>
           <a:prstGeom prst="rect">
@@ -18677,7 +18650,7 @@
         </p:nvSpPr>
         <p:spPr>
           <a:xfrm>
-            <a:off x="566928" y="4681728"/>
+            <a:off x="566928" y="4846320"/>
             <a:ext cx="11057839" cy="658368"/>
           </a:xfrm>
           <a:prstGeom prst="roundRect">
@@ -18704,7 +18677,7 @@
         </p:nvSpPr>
         <p:spPr>
           <a:xfrm>
-            <a:off x="786384" y="4791456"/>
+            <a:off x="786384" y="4956048"/>
             <a:ext cx="10618927" cy="438912"/>
           </a:xfrm>
           <a:prstGeom prst="rect">
@@ -18997,7 +18970,7 @@
           </p:nvPr>
         </p:nvGraphicFramePr>
         <p:xfrm>
-          <a:off x="566928" y="1481328"/>
+          <a:off x="566928" y="1645920"/>
           <a:ext cx="11057839" cy="914400"/>
         </p:xfrm>
         <a:graphic>
@@ -19639,7 +19612,7 @@
         </p:nvSpPr>
         <p:spPr>
           <a:xfrm>
-            <a:off x="566928" y="3081528"/>
+            <a:off x="566928" y="3246120"/>
             <a:ext cx="11057839" cy="1600200"/>
           </a:xfrm>
           <a:prstGeom prst="roundRect">
@@ -19666,7 +19639,7 @@
         </p:nvSpPr>
         <p:spPr>
           <a:xfrm>
-            <a:off x="768096" y="3227832"/>
+            <a:off x="768096" y="3392424"/>
             <a:ext cx="10655503" cy="292608"/>
           </a:xfrm>
           <a:prstGeom prst="rect">
@@ -19705,7 +19678,7 @@
         </p:nvSpPr>
         <p:spPr>
           <a:xfrm>
-            <a:off x="786384" y="3575304"/>
+            <a:off x="786384" y="3739896"/>
             <a:ext cx="10637215" cy="978408"/>
           </a:xfrm>
           <a:prstGeom prst="rect">
@@ -19858,7 +19831,7 @@
         </p:nvSpPr>
         <p:spPr>
           <a:xfrm>
-            <a:off x="566928" y="4864608"/>
+            <a:off x="566928" y="5029200"/>
             <a:ext cx="11057839" cy="731520"/>
           </a:xfrm>
           <a:prstGeom prst="roundRect">
@@ -19885,7 +19858,7 @@
         </p:nvSpPr>
         <p:spPr>
           <a:xfrm>
-            <a:off x="786384" y="4974336"/>
+            <a:off x="786384" y="5138928"/>
             <a:ext cx="10618927" cy="512064"/>
           </a:xfrm>
           <a:prstGeom prst="rect">
@@ -20171,7 +20144,7 @@
         </p:nvSpPr>
         <p:spPr>
           <a:xfrm>
-            <a:off x="566928" y="1481328"/>
+            <a:off x="566928" y="1645920"/>
             <a:ext cx="2476424" cy="868680"/>
           </a:xfrm>
           <a:prstGeom prst="roundRect">
@@ -20198,7 +20171,7 @@
         </p:nvSpPr>
         <p:spPr>
           <a:xfrm>
-            <a:off x="658368" y="1481328"/>
+            <a:off x="658368" y="1645920"/>
             <a:ext cx="2293544" cy="868680"/>
           </a:xfrm>
           <a:prstGeom prst="rect">
@@ -20260,7 +20233,7 @@
         </p:nvSpPr>
         <p:spPr>
           <a:xfrm>
-            <a:off x="3043352" y="1481328"/>
+            <a:off x="3043352" y="1645920"/>
             <a:ext cx="384048" cy="868680"/>
           </a:xfrm>
           <a:prstGeom prst="rect">
@@ -20299,7 +20272,7 @@
         </p:nvSpPr>
         <p:spPr>
           <a:xfrm>
-            <a:off x="3427400" y="1481328"/>
+            <a:off x="3427400" y="1645920"/>
             <a:ext cx="2476424" cy="868680"/>
           </a:xfrm>
           <a:prstGeom prst="roundRect">
@@ -20326,7 +20299,7 @@
         </p:nvSpPr>
         <p:spPr>
           <a:xfrm>
-            <a:off x="3518840" y="1481328"/>
+            <a:off x="3518840" y="1645920"/>
             <a:ext cx="2293544" cy="868680"/>
           </a:xfrm>
           <a:prstGeom prst="rect">
@@ -20388,7 +20361,7 @@
         </p:nvSpPr>
         <p:spPr>
           <a:xfrm>
-            <a:off x="5903824" y="1481328"/>
+            <a:off x="5903824" y="1645920"/>
             <a:ext cx="384048" cy="868680"/>
           </a:xfrm>
           <a:prstGeom prst="rect">
@@ -20427,7 +20400,7 @@
         </p:nvSpPr>
         <p:spPr>
           <a:xfrm>
-            <a:off x="6287872" y="1481328"/>
+            <a:off x="6287872" y="1645920"/>
             <a:ext cx="2476424" cy="868680"/>
           </a:xfrm>
           <a:prstGeom prst="roundRect">
@@ -20454,7 +20427,7 @@
         </p:nvSpPr>
         <p:spPr>
           <a:xfrm>
-            <a:off x="6379312" y="1481328"/>
+            <a:off x="6379312" y="1645920"/>
             <a:ext cx="2293544" cy="868680"/>
           </a:xfrm>
           <a:prstGeom prst="rect">
@@ -20496,7 +20469,7 @@
         </p:nvSpPr>
         <p:spPr>
           <a:xfrm>
-            <a:off x="8764295" y="1481328"/>
+            <a:off x="8764295" y="1645920"/>
             <a:ext cx="384048" cy="868680"/>
           </a:xfrm>
           <a:prstGeom prst="rect">
@@ -20535,7 +20508,7 @@
         </p:nvSpPr>
         <p:spPr>
           <a:xfrm>
-            <a:off x="9148343" y="1481328"/>
+            <a:off x="9148343" y="1645920"/>
             <a:ext cx="2476424" cy="868680"/>
           </a:xfrm>
           <a:prstGeom prst="roundRect">
@@ -20562,7 +20535,7 @@
         </p:nvSpPr>
         <p:spPr>
           <a:xfrm>
-            <a:off x="9239783" y="1481328"/>
+            <a:off x="9239783" y="1645920"/>
             <a:ext cx="2293544" cy="868680"/>
           </a:xfrm>
           <a:prstGeom prst="rect">
@@ -20604,7 +20577,7 @@
         </p:nvSpPr>
         <p:spPr>
           <a:xfrm>
-            <a:off x="566928" y="2532888"/>
+            <a:off x="566928" y="2697480"/>
             <a:ext cx="5368900" cy="1737360"/>
           </a:xfrm>
           <a:prstGeom prst="roundRect">
@@ -20631,7 +20604,7 @@
         </p:nvSpPr>
         <p:spPr>
           <a:xfrm>
-            <a:off x="768096" y="2679192"/>
+            <a:off x="768096" y="2843784"/>
             <a:ext cx="4966564" cy="292608"/>
           </a:xfrm>
           <a:prstGeom prst="rect">
@@ -20670,7 +20643,7 @@
         </p:nvSpPr>
         <p:spPr>
           <a:xfrm>
-            <a:off x="786384" y="3026664"/>
+            <a:off x="786384" y="3191256"/>
             <a:ext cx="4948276" cy="1115568"/>
           </a:xfrm>
           <a:prstGeom prst="rect">
@@ -20772,7 +20745,7 @@
         </p:nvSpPr>
         <p:spPr>
           <a:xfrm>
-            <a:off x="6255868" y="2532888"/>
+            <a:off x="6255868" y="2697480"/>
             <a:ext cx="5368900" cy="1737360"/>
           </a:xfrm>
           <a:prstGeom prst="roundRect">
@@ -20799,7 +20772,7 @@
         </p:nvSpPr>
         <p:spPr>
           <a:xfrm>
-            <a:off x="6457036" y="2679192"/>
+            <a:off x="6457036" y="2843784"/>
             <a:ext cx="4966564" cy="292608"/>
           </a:xfrm>
           <a:prstGeom prst="rect">
@@ -20838,7 +20811,7 @@
         </p:nvSpPr>
         <p:spPr>
           <a:xfrm>
-            <a:off x="6475324" y="3054096"/>
+            <a:off x="6475324" y="3218688"/>
             <a:ext cx="4929988" cy="1097280"/>
           </a:xfrm>
           <a:prstGeom prst="rect">
@@ -20983,7 +20956,7 @@
         </p:nvSpPr>
         <p:spPr>
           <a:xfrm>
-            <a:off x="566928" y="4453128"/>
+            <a:off x="566928" y="4617720"/>
             <a:ext cx="11057839" cy="685800"/>
           </a:xfrm>
           <a:prstGeom prst="roundRect">
@@ -21010,7 +20983,7 @@
         </p:nvSpPr>
         <p:spPr>
           <a:xfrm>
-            <a:off x="786384" y="4562856"/>
+            <a:off x="786384" y="4727448"/>
             <a:ext cx="10618927" cy="466344"/>
           </a:xfrm>
           <a:prstGeom prst="rect">
@@ -21296,7 +21269,7 @@
         </p:nvSpPr>
         <p:spPr>
           <a:xfrm>
-            <a:off x="566928" y="1481328"/>
+            <a:off x="566928" y="1645920"/>
             <a:ext cx="3472586" cy="1463040"/>
           </a:xfrm>
           <a:prstGeom prst="roundRect">
@@ -21323,7 +21296,7 @@
         </p:nvSpPr>
         <p:spPr>
           <a:xfrm>
-            <a:off x="768096" y="1627632"/>
+            <a:off x="768096" y="1792224"/>
             <a:ext cx="3070250" cy="219456"/>
           </a:xfrm>
           <a:prstGeom prst="rect">
@@ -21362,7 +21335,7 @@
         </p:nvSpPr>
         <p:spPr>
           <a:xfrm>
-            <a:off x="768096" y="1865376"/>
+            <a:off x="768096" y="2029968"/>
             <a:ext cx="3070250" cy="292608"/>
           </a:xfrm>
           <a:prstGeom prst="rect">
@@ -21401,7 +21374,7 @@
         </p:nvSpPr>
         <p:spPr>
           <a:xfrm>
-            <a:off x="768096" y="2212848"/>
+            <a:off x="768096" y="2377440"/>
             <a:ext cx="3070250" cy="603504"/>
           </a:xfrm>
           <a:prstGeom prst="rect">
@@ -21443,7 +21416,7 @@
         </p:nvSpPr>
         <p:spPr>
           <a:xfrm>
-            <a:off x="4359554" y="1481328"/>
+            <a:off x="4359554" y="1645920"/>
             <a:ext cx="3472586" cy="1463040"/>
           </a:xfrm>
           <a:prstGeom prst="roundRect">
@@ -21470,7 +21443,7 @@
         </p:nvSpPr>
         <p:spPr>
           <a:xfrm>
-            <a:off x="4560722" y="1627632"/>
+            <a:off x="4560722" y="1792224"/>
             <a:ext cx="3070250" cy="219456"/>
           </a:xfrm>
           <a:prstGeom prst="rect">
@@ -21509,7 +21482,7 @@
         </p:nvSpPr>
         <p:spPr>
           <a:xfrm>
-            <a:off x="4560722" y="1865376"/>
+            <a:off x="4560722" y="2029968"/>
             <a:ext cx="3070250" cy="292608"/>
           </a:xfrm>
           <a:prstGeom prst="rect">
@@ -21548,7 +21521,7 @@
         </p:nvSpPr>
         <p:spPr>
           <a:xfrm>
-            <a:off x="4560722" y="2212848"/>
+            <a:off x="4560722" y="2377440"/>
             <a:ext cx="3070250" cy="603504"/>
           </a:xfrm>
           <a:prstGeom prst="rect">
@@ -21590,7 +21563,7 @@
         </p:nvSpPr>
         <p:spPr>
           <a:xfrm>
-            <a:off x="8152181" y="1481328"/>
+            <a:off x="8152181" y="1645920"/>
             <a:ext cx="3472586" cy="1463040"/>
           </a:xfrm>
           <a:prstGeom prst="roundRect">
@@ -21617,7 +21590,7 @@
         </p:nvSpPr>
         <p:spPr>
           <a:xfrm>
-            <a:off x="8353349" y="1627632"/>
+            <a:off x="8353349" y="1792224"/>
             <a:ext cx="3070250" cy="219456"/>
           </a:xfrm>
           <a:prstGeom prst="rect">
@@ -21656,7 +21629,7 @@
         </p:nvSpPr>
         <p:spPr>
           <a:xfrm>
-            <a:off x="8353349" y="1865376"/>
+            <a:off x="8353349" y="2029968"/>
             <a:ext cx="3070250" cy="292608"/>
           </a:xfrm>
           <a:prstGeom prst="rect">
@@ -21695,7 +21668,7 @@
         </p:nvSpPr>
         <p:spPr>
           <a:xfrm>
-            <a:off x="8353349" y="2212848"/>
+            <a:off x="8353349" y="2377440"/>
             <a:ext cx="3070250" cy="603504"/>
           </a:xfrm>
           <a:prstGeom prst="rect">
@@ -21737,7 +21710,7 @@
         </p:nvSpPr>
         <p:spPr>
           <a:xfrm>
-            <a:off x="566928" y="3127248"/>
+            <a:off x="566928" y="3291840"/>
             <a:ext cx="11057839" cy="1005840"/>
           </a:xfrm>
           <a:prstGeom prst="roundRect">
@@ -21764,7 +21737,7 @@
         </p:nvSpPr>
         <p:spPr>
           <a:xfrm>
-            <a:off x="768096" y="3273552"/>
+            <a:off x="768096" y="3438144"/>
             <a:ext cx="10655503" cy="292608"/>
           </a:xfrm>
           <a:prstGeom prst="rect">
@@ -21803,7 +21776,7 @@
         </p:nvSpPr>
         <p:spPr>
           <a:xfrm>
-            <a:off x="786384" y="3602736"/>
+            <a:off x="786384" y="3767328"/>
             <a:ext cx="10618927" cy="457200"/>
           </a:xfrm>
           <a:prstGeom prst="rect">
@@ -21926,7 +21899,7 @@
         </p:nvSpPr>
         <p:spPr>
           <a:xfrm>
-            <a:off x="566928" y="4315968"/>
+            <a:off x="566928" y="4480560"/>
             <a:ext cx="11057839" cy="822960"/>
           </a:xfrm>
           <a:prstGeom prst="roundRect">
@@ -21953,7 +21926,7 @@
         </p:nvSpPr>
         <p:spPr>
           <a:xfrm>
-            <a:off x="749808" y="4471416"/>
+            <a:off x="749808" y="4636008"/>
             <a:ext cx="566928" cy="274320"/>
           </a:xfrm>
           <a:prstGeom prst="roundRect">
@@ -21980,7 +21953,7 @@
         </p:nvSpPr>
         <p:spPr>
           <a:xfrm>
-            <a:off x="749808" y="4471416"/>
+            <a:off x="749808" y="4636008"/>
             <a:ext cx="566928" cy="274320"/>
           </a:xfrm>
           <a:prstGeom prst="rect">
@@ -22019,7 +21992,7 @@
         </p:nvSpPr>
         <p:spPr>
           <a:xfrm>
-            <a:off x="1408176" y="4434840"/>
+            <a:off x="1408176" y="4599432"/>
             <a:ext cx="10015423" cy="585216"/>
           </a:xfrm>
           <a:prstGeom prst="rect">
@@ -22363,7 +22336,7 @@
           </p:nvPr>
         </p:nvGraphicFramePr>
         <p:xfrm>
-          <a:off x="566928" y="1481328"/>
+          <a:off x="566928" y="1645920"/>
           <a:ext cx="11057839" cy="914400"/>
         </p:xfrm>
         <a:graphic>
@@ -23214,7 +23187,7 @@
         </p:nvSpPr>
         <p:spPr>
           <a:xfrm>
-            <a:off x="566928" y="4727448"/>
+            <a:off x="566928" y="4892040"/>
             <a:ext cx="11057839" cy="685800"/>
           </a:xfrm>
           <a:prstGeom prst="roundRect">
@@ -23241,7 +23214,7 @@
         </p:nvSpPr>
         <p:spPr>
           <a:xfrm>
-            <a:off x="786384" y="4837176"/>
+            <a:off x="786384" y="5001768"/>
             <a:ext cx="10618927" cy="466344"/>
           </a:xfrm>
           <a:prstGeom prst="rect">
@@ -23561,7 +23534,7 @@
         </p:nvSpPr>
         <p:spPr>
           <a:xfrm>
-            <a:off x="566928" y="1481328"/>
+            <a:off x="566928" y="1645920"/>
             <a:ext cx="11057839" cy="1874520"/>
           </a:xfrm>
           <a:prstGeom prst="roundRect">
@@ -23588,7 +23561,7 @@
         </p:nvSpPr>
         <p:spPr>
           <a:xfrm>
-            <a:off x="786384" y="1627632"/>
+            <a:off x="786384" y="1792224"/>
             <a:ext cx="10637215" cy="1600200"/>
           </a:xfrm>
           <a:prstGeom prst="rect">
@@ -23877,7 +23850,7 @@
         </p:nvSpPr>
         <p:spPr>
           <a:xfrm>
-            <a:off x="566928" y="3538728"/>
+            <a:off x="566928" y="3703320"/>
             <a:ext cx="11057839" cy="1371600"/>
           </a:xfrm>
           <a:prstGeom prst="roundRect">
@@ -23904,7 +23877,7 @@
         </p:nvSpPr>
         <p:spPr>
           <a:xfrm>
-            <a:off x="768096" y="3685032"/>
+            <a:off x="768096" y="3849624"/>
             <a:ext cx="10655503" cy="292608"/>
           </a:xfrm>
           <a:prstGeom prst="rect">
@@ -23943,7 +23916,7 @@
         </p:nvSpPr>
         <p:spPr>
           <a:xfrm>
-            <a:off x="786384" y="4032504"/>
+            <a:off x="786384" y="4197096"/>
             <a:ext cx="10637215" cy="749808"/>
           </a:xfrm>
           <a:prstGeom prst="rect">
@@ -24130,7 +24103,7 @@
         </p:nvSpPr>
         <p:spPr>
           <a:xfrm>
-            <a:off x="566928" y="5093208"/>
+            <a:off x="566928" y="5257800"/>
             <a:ext cx="11057839" cy="658368"/>
           </a:xfrm>
           <a:prstGeom prst="roundRect">
@@ -24157,7 +24130,7 @@
         </p:nvSpPr>
         <p:spPr>
           <a:xfrm>
-            <a:off x="786384" y="5202936"/>
+            <a:off x="786384" y="5367528"/>
             <a:ext cx="10618927" cy="438912"/>
           </a:xfrm>
           <a:prstGeom prst="rect">
@@ -24450,7 +24423,7 @@
           </p:nvPr>
         </p:nvGraphicFramePr>
         <p:xfrm>
-          <a:off x="566928" y="1481328"/>
+          <a:off x="566928" y="1645920"/>
           <a:ext cx="5346040" cy="914400"/>
         </p:xfrm>
         <a:graphic>
@@ -25998,7 +25971,7 @@
           </p:nvPr>
         </p:nvGraphicFramePr>
         <p:xfrm>
-          <a:off x="6278728" y="1481328"/>
+          <a:off x="6278728" y="1645920"/>
           <a:ext cx="5346040" cy="914400"/>
         </p:xfrm>
         <a:graphic>
@@ -27773,7 +27746,7 @@
           </p:nvPr>
         </p:nvGraphicFramePr>
         <p:xfrm>
-          <a:off x="566928" y="1481328"/>
+          <a:off x="566928" y="1645920"/>
           <a:ext cx="11057839" cy="914400"/>
         </p:xfrm>
         <a:graphic>
@@ -29857,7 +29830,7 @@
         </p:nvSpPr>
         <p:spPr>
           <a:xfrm>
-            <a:off x="566928" y="4773168"/>
+            <a:off x="566928" y="4937760"/>
             <a:ext cx="11057839" cy="237744"/>
           </a:xfrm>
           <a:prstGeom prst="rect">
@@ -30123,7 +30096,7 @@
         </p:nvSpPr>
         <p:spPr>
           <a:xfrm>
-            <a:off x="566928" y="1481328"/>
+            <a:off x="566928" y="1645920"/>
             <a:ext cx="5368900" cy="1874520"/>
           </a:xfrm>
           <a:prstGeom prst="roundRect">
@@ -30150,7 +30123,7 @@
         </p:nvSpPr>
         <p:spPr>
           <a:xfrm>
-            <a:off x="768096" y="1627632"/>
+            <a:off x="768096" y="1792224"/>
             <a:ext cx="4966564" cy="292608"/>
           </a:xfrm>
           <a:prstGeom prst="rect">
@@ -30189,7 +30162,7 @@
         </p:nvSpPr>
         <p:spPr>
           <a:xfrm>
-            <a:off x="786384" y="1975104"/>
+            <a:off x="786384" y="2139696"/>
             <a:ext cx="4948276" cy="1252728"/>
           </a:xfrm>
           <a:prstGeom prst="rect">
@@ -30325,7 +30298,7 @@
         </p:nvSpPr>
         <p:spPr>
           <a:xfrm>
-            <a:off x="6255868" y="1481328"/>
+            <a:off x="6255868" y="1645920"/>
             <a:ext cx="5368900" cy="1874520"/>
           </a:xfrm>
           <a:prstGeom prst="roundRect">
@@ -30352,7 +30325,7 @@
         </p:nvSpPr>
         <p:spPr>
           <a:xfrm>
-            <a:off x="6457036" y="1627632"/>
+            <a:off x="6457036" y="1792224"/>
             <a:ext cx="4966564" cy="292608"/>
           </a:xfrm>
           <a:prstGeom prst="rect">
@@ -30391,7 +30364,7 @@
         </p:nvSpPr>
         <p:spPr>
           <a:xfrm>
-            <a:off x="6475324" y="1975104"/>
+            <a:off x="6475324" y="2139696"/>
             <a:ext cx="4948276" cy="1252728"/>
           </a:xfrm>
           <a:prstGeom prst="rect">
@@ -30493,7 +30466,7 @@
         </p:nvSpPr>
         <p:spPr>
           <a:xfrm>
-            <a:off x="566928" y="3538728"/>
+            <a:off x="566928" y="3703320"/>
             <a:ext cx="11057839" cy="822960"/>
           </a:xfrm>
           <a:prstGeom prst="roundRect">
@@ -30520,7 +30493,7 @@
         </p:nvSpPr>
         <p:spPr>
           <a:xfrm>
-            <a:off x="749808" y="3694176"/>
+            <a:off x="749808" y="3858768"/>
             <a:ext cx="566928" cy="274320"/>
           </a:xfrm>
           <a:prstGeom prst="roundRect">
@@ -30547,7 +30520,7 @@
         </p:nvSpPr>
         <p:spPr>
           <a:xfrm>
-            <a:off x="749808" y="3694176"/>
+            <a:off x="749808" y="3858768"/>
             <a:ext cx="566928" cy="274320"/>
           </a:xfrm>
           <a:prstGeom prst="rect">
@@ -30586,7 +30559,7 @@
         </p:nvSpPr>
         <p:spPr>
           <a:xfrm>
-            <a:off x="1408176" y="3657600"/>
+            <a:off x="1408176" y="3822192"/>
             <a:ext cx="10015423" cy="585216"/>
           </a:xfrm>
           <a:prstGeom prst="rect">
@@ -30662,7 +30635,7 @@
         </p:nvSpPr>
         <p:spPr>
           <a:xfrm>
-            <a:off x="566928" y="4498848"/>
+            <a:off x="566928" y="4663440"/>
             <a:ext cx="11057839" cy="841248"/>
           </a:xfrm>
           <a:prstGeom prst="roundRect">
@@ -30689,7 +30662,7 @@
         </p:nvSpPr>
         <p:spPr>
           <a:xfrm>
-            <a:off x="786384" y="4608576"/>
+            <a:off x="786384" y="4773168"/>
             <a:ext cx="10618927" cy="621792"/>
           </a:xfrm>
           <a:prstGeom prst="rect">
@@ -30975,7 +30948,7 @@
         </p:nvSpPr>
         <p:spPr>
           <a:xfrm>
-            <a:off x="566928" y="1481328"/>
+            <a:off x="566928" y="1645920"/>
             <a:ext cx="11057839" cy="3931920"/>
           </a:xfrm>
           <a:prstGeom prst="rect">
@@ -31624,7 +31597,7 @@
         </p:nvSpPr>
         <p:spPr>
           <a:xfrm>
-            <a:off x="566928" y="1481328"/>
+            <a:off x="566928" y="1645920"/>
             <a:ext cx="11057839" cy="3931920"/>
           </a:xfrm>
           <a:prstGeom prst="rect">
@@ -32046,7 +32019,7 @@
         </p:nvSpPr>
         <p:spPr>
           <a:xfrm>
-            <a:off x="566928" y="5047488"/>
+            <a:off x="566928" y="5212080"/>
             <a:ext cx="11057839" cy="777240"/>
           </a:xfrm>
           <a:prstGeom prst="roundRect">
@@ -32073,7 +32046,7 @@
         </p:nvSpPr>
         <p:spPr>
           <a:xfrm>
-            <a:off x="786384" y="5157216"/>
+            <a:off x="786384" y="5321808"/>
             <a:ext cx="10618927" cy="557784"/>
           </a:xfrm>
           <a:prstGeom prst="rect">
@@ -32366,7 +32339,7 @@
           </p:nvPr>
         </p:nvGraphicFramePr>
         <p:xfrm>
-          <a:off x="566928" y="1481328"/>
+          <a:off x="566928" y="1645920"/>
           <a:ext cx="11057839" cy="914400"/>
         </p:xfrm>
         <a:graphic>
@@ -33487,7 +33460,7 @@
         </p:nvSpPr>
         <p:spPr>
           <a:xfrm>
-            <a:off x="566928" y="3355848"/>
+            <a:off x="566928" y="4279392"/>
             <a:ext cx="11057839" cy="237744"/>
           </a:xfrm>
           <a:prstGeom prst="rect">
@@ -33526,7 +33499,7 @@
         </p:nvSpPr>
         <p:spPr>
           <a:xfrm>
-            <a:off x="566928" y="3721608"/>
+            <a:off x="566928" y="4626864"/>
             <a:ext cx="11057839" cy="914400"/>
           </a:xfrm>
           <a:prstGeom prst="roundRect">
@@ -33553,7 +33526,7 @@
         </p:nvSpPr>
         <p:spPr>
           <a:xfrm>
-            <a:off x="749808" y="3877056"/>
+            <a:off x="749808" y="4782312"/>
             <a:ext cx="566928" cy="274320"/>
           </a:xfrm>
           <a:prstGeom prst="roundRect">
@@ -33580,7 +33553,7 @@
         </p:nvSpPr>
         <p:spPr>
           <a:xfrm>
-            <a:off x="749808" y="3877056"/>
+            <a:off x="749808" y="4782312"/>
             <a:ext cx="566928" cy="274320"/>
           </a:xfrm>
           <a:prstGeom prst="rect">
@@ -33619,7 +33592,7 @@
         </p:nvSpPr>
         <p:spPr>
           <a:xfrm>
-            <a:off x="1408176" y="3840480"/>
+            <a:off x="1408176" y="4745736"/>
             <a:ext cx="10015423" cy="676656"/>
           </a:xfrm>
           <a:prstGeom prst="rect">
@@ -33990,7 +33963,7 @@
         </p:nvSpPr>
         <p:spPr>
           <a:xfrm>
-            <a:off x="566928" y="1481328"/>
+            <a:off x="566928" y="1645920"/>
             <a:ext cx="2593010" cy="1417320"/>
           </a:xfrm>
           <a:prstGeom prst="roundRect">
@@ -34017,7 +33990,7 @@
         </p:nvSpPr>
         <p:spPr>
           <a:xfrm>
-            <a:off x="566928" y="1572768"/>
+            <a:off x="566928" y="1737360"/>
             <a:ext cx="2593010" cy="502920"/>
           </a:xfrm>
           <a:prstGeom prst="rect">
@@ -34056,7 +34029,7 @@
         </p:nvSpPr>
         <p:spPr>
           <a:xfrm>
-            <a:off x="658368" y="2093976"/>
+            <a:off x="658368" y="2258568"/>
             <a:ext cx="2410130" cy="713232"/>
           </a:xfrm>
           <a:prstGeom prst="rect">
@@ -34112,7 +34085,7 @@
         </p:nvSpPr>
         <p:spPr>
           <a:xfrm>
-            <a:off x="3388538" y="1481328"/>
+            <a:off x="3388538" y="1645920"/>
             <a:ext cx="2593010" cy="1417320"/>
           </a:xfrm>
           <a:prstGeom prst="roundRect">
@@ -34139,7 +34112,7 @@
         </p:nvSpPr>
         <p:spPr>
           <a:xfrm>
-            <a:off x="3388538" y="1572768"/>
+            <a:off x="3388538" y="1737360"/>
             <a:ext cx="2593010" cy="502920"/>
           </a:xfrm>
           <a:prstGeom prst="rect">
@@ -34178,7 +34151,7 @@
         </p:nvSpPr>
         <p:spPr>
           <a:xfrm>
-            <a:off x="3479978" y="2093976"/>
+            <a:off x="3479978" y="2258568"/>
             <a:ext cx="2410130" cy="713232"/>
           </a:xfrm>
           <a:prstGeom prst="rect">
@@ -34234,7 +34207,7 @@
         </p:nvSpPr>
         <p:spPr>
           <a:xfrm>
-            <a:off x="6210148" y="1481328"/>
+            <a:off x="6210148" y="1645920"/>
             <a:ext cx="2593010" cy="1417320"/>
           </a:xfrm>
           <a:prstGeom prst="roundRect">
@@ -34261,7 +34234,7 @@
         </p:nvSpPr>
         <p:spPr>
           <a:xfrm>
-            <a:off x="6210148" y="1572768"/>
+            <a:off x="6210148" y="1737360"/>
             <a:ext cx="2593010" cy="502920"/>
           </a:xfrm>
           <a:prstGeom prst="rect">
@@ -34300,7 +34273,7 @@
         </p:nvSpPr>
         <p:spPr>
           <a:xfrm>
-            <a:off x="6301588" y="2093976"/>
+            <a:off x="6301588" y="2258568"/>
             <a:ext cx="2410130" cy="713232"/>
           </a:xfrm>
           <a:prstGeom prst="rect">
@@ -34356,7 +34329,7 @@
         </p:nvSpPr>
         <p:spPr>
           <a:xfrm>
-            <a:off x="9031757" y="1481328"/>
+            <a:off x="9031757" y="1645920"/>
             <a:ext cx="2593010" cy="1417320"/>
           </a:xfrm>
           <a:prstGeom prst="roundRect">
@@ -34383,7 +34356,7 @@
         </p:nvSpPr>
         <p:spPr>
           <a:xfrm>
-            <a:off x="9031757" y="1572768"/>
+            <a:off x="9031757" y="1737360"/>
             <a:ext cx="2593010" cy="402336"/>
           </a:xfrm>
           <a:prstGeom prst="rect">
@@ -34422,7 +34395,7 @@
         </p:nvSpPr>
         <p:spPr>
           <a:xfrm>
-            <a:off x="9123197" y="1993392"/>
+            <a:off x="9123197" y="2157984"/>
             <a:ext cx="2410130" cy="813816"/>
           </a:xfrm>
           <a:prstGeom prst="rect">
@@ -34461,7 +34434,7 @@
         </p:nvSpPr>
         <p:spPr>
           <a:xfrm>
-            <a:off x="566928" y="3081528"/>
+            <a:off x="566928" y="3246120"/>
             <a:ext cx="11057839" cy="868680"/>
           </a:xfrm>
           <a:prstGeom prst="roundRect">
@@ -34488,7 +34461,7 @@
         </p:nvSpPr>
         <p:spPr>
           <a:xfrm>
-            <a:off x="786384" y="3218688"/>
+            <a:off x="786384" y="3383280"/>
             <a:ext cx="10618927" cy="594360"/>
           </a:xfrm>
           <a:prstGeom prst="rect">
@@ -34564,7 +34537,7 @@
         </p:nvSpPr>
         <p:spPr>
           <a:xfrm>
-            <a:off x="566928" y="4133088"/>
+            <a:off x="566928" y="4297680"/>
             <a:ext cx="11057839" cy="914400"/>
           </a:xfrm>
           <a:prstGeom prst="roundRect">
@@ -34591,7 +34564,7 @@
         </p:nvSpPr>
         <p:spPr>
           <a:xfrm>
-            <a:off x="749808" y="4288536"/>
+            <a:off x="749808" y="4453128"/>
             <a:ext cx="566928" cy="274320"/>
           </a:xfrm>
           <a:prstGeom prst="roundRect">
@@ -34618,7 +34591,7 @@
         </p:nvSpPr>
         <p:spPr>
           <a:xfrm>
-            <a:off x="749808" y="4288536"/>
+            <a:off x="749808" y="4453128"/>
             <a:ext cx="566928" cy="274320"/>
           </a:xfrm>
           <a:prstGeom prst="rect">
@@ -34657,7 +34630,7 @@
         </p:nvSpPr>
         <p:spPr>
           <a:xfrm>
-            <a:off x="1408176" y="4251960"/>
+            <a:off x="1408176" y="4416552"/>
             <a:ext cx="10015423" cy="676656"/>
           </a:xfrm>
           <a:prstGeom prst="rect">
@@ -34733,7 +34706,7 @@
         </p:nvSpPr>
         <p:spPr>
           <a:xfrm>
-            <a:off x="566928" y="5193792"/>
+            <a:off x="566928" y="5358384"/>
             <a:ext cx="11057839" cy="310896"/>
           </a:xfrm>
           <a:prstGeom prst="rect">
@@ -35026,7 +34999,7 @@
         </p:nvSpPr>
         <p:spPr>
           <a:xfrm>
-            <a:off x="566928" y="1481328"/>
+            <a:off x="566928" y="1645920"/>
             <a:ext cx="32004" cy="914400"/>
           </a:xfrm>
           <a:prstGeom prst="rect">
@@ -35051,7 +35024,7 @@
         </p:nvSpPr>
         <p:spPr>
           <a:xfrm>
-            <a:off x="786384" y="1481328"/>
+            <a:off x="786384" y="1645920"/>
             <a:ext cx="10838383" cy="914400"/>
           </a:xfrm>
           <a:prstGeom prst="rect">
@@ -35093,7 +35066,7 @@
         </p:nvSpPr>
         <p:spPr>
           <a:xfrm>
-            <a:off x="566928" y="2578608"/>
+            <a:off x="566928" y="2743200"/>
             <a:ext cx="5368900" cy="1600200"/>
           </a:xfrm>
           <a:prstGeom prst="roundRect">
@@ -35120,7 +35093,7 @@
         </p:nvSpPr>
         <p:spPr>
           <a:xfrm>
-            <a:off x="768096" y="2724912"/>
+            <a:off x="768096" y="2889504"/>
             <a:ext cx="4966564" cy="292608"/>
           </a:xfrm>
           <a:prstGeom prst="rect">
@@ -35159,7 +35132,7 @@
         </p:nvSpPr>
         <p:spPr>
           <a:xfrm>
-            <a:off x="786384" y="3072384"/>
+            <a:off x="786384" y="3236976"/>
             <a:ext cx="4948276" cy="978408"/>
           </a:xfrm>
           <a:prstGeom prst="rect">
@@ -35261,7 +35234,7 @@
         </p:nvSpPr>
         <p:spPr>
           <a:xfrm>
-            <a:off x="6255868" y="2578608"/>
+            <a:off x="6255868" y="2743200"/>
             <a:ext cx="5368900" cy="1600200"/>
           </a:xfrm>
           <a:prstGeom prst="roundRect">
@@ -35288,7 +35261,7 @@
         </p:nvSpPr>
         <p:spPr>
           <a:xfrm>
-            <a:off x="6457036" y="2724912"/>
+            <a:off x="6457036" y="2889504"/>
             <a:ext cx="4966564" cy="292608"/>
           </a:xfrm>
           <a:prstGeom prst="rect">
@@ -35327,7 +35300,7 @@
         </p:nvSpPr>
         <p:spPr>
           <a:xfrm>
-            <a:off x="6475324" y="3072384"/>
+            <a:off x="6475324" y="3236976"/>
             <a:ext cx="4948276" cy="978408"/>
           </a:xfrm>
           <a:prstGeom prst="rect">
@@ -35425,7 +35398,7 @@
         </p:nvSpPr>
         <p:spPr>
           <a:xfrm>
-            <a:off x="566928" y="4361688"/>
+            <a:off x="566928" y="4526280"/>
             <a:ext cx="11057839" cy="822960"/>
           </a:xfrm>
           <a:prstGeom prst="roundRect">
@@ -35452,7 +35425,7 @@
         </p:nvSpPr>
         <p:spPr>
           <a:xfrm>
-            <a:off x="749808" y="4517136"/>
+            <a:off x="749808" y="4681728"/>
             <a:ext cx="566928" cy="274320"/>
           </a:xfrm>
           <a:prstGeom prst="roundRect">
@@ -35479,7 +35452,7 @@
         </p:nvSpPr>
         <p:spPr>
           <a:xfrm>
-            <a:off x="749808" y="4517136"/>
+            <a:off x="749808" y="4681728"/>
             <a:ext cx="566928" cy="274320"/>
           </a:xfrm>
           <a:prstGeom prst="rect">
@@ -35518,7 +35491,7 @@
         </p:nvSpPr>
         <p:spPr>
           <a:xfrm>
-            <a:off x="1408176" y="4480560"/>
+            <a:off x="1408176" y="4645152"/>
             <a:ext cx="10015423" cy="585216"/>
           </a:xfrm>
           <a:prstGeom prst="rect">
@@ -35594,7 +35567,7 @@
         </p:nvSpPr>
         <p:spPr>
           <a:xfrm>
-            <a:off x="566928" y="5321808"/>
+            <a:off x="566928" y="5486400"/>
             <a:ext cx="11057839" cy="310896"/>
           </a:xfrm>
           <a:prstGeom prst="rect">
@@ -35887,7 +35860,7 @@
         </p:nvSpPr>
         <p:spPr>
           <a:xfrm>
-            <a:off x="566928" y="1481328"/>
+            <a:off x="566928" y="1645920"/>
             <a:ext cx="5368900" cy="1828800"/>
           </a:xfrm>
           <a:prstGeom prst="roundRect">
@@ -35914,7 +35887,7 @@
         </p:nvSpPr>
         <p:spPr>
           <a:xfrm>
-            <a:off x="768096" y="1627632"/>
+            <a:off x="768096" y="1792224"/>
             <a:ext cx="4966564" cy="292608"/>
           </a:xfrm>
           <a:prstGeom prst="rect">
@@ -35953,7 +35926,7 @@
         </p:nvSpPr>
         <p:spPr>
           <a:xfrm>
-            <a:off x="886968" y="2139696"/>
+            <a:off x="886968" y="2304288"/>
             <a:ext cx="4728820" cy="1005840"/>
           </a:xfrm>
           <a:prstGeom prst="roundRect">
@@ -35980,7 +35953,7 @@
         </p:nvSpPr>
         <p:spPr>
           <a:xfrm>
-            <a:off x="886968" y="2231136"/>
+            <a:off x="886968" y="2395728"/>
             <a:ext cx="4728820" cy="502920"/>
           </a:xfrm>
           <a:prstGeom prst="rect">
@@ -36019,7 +35992,7 @@
         </p:nvSpPr>
         <p:spPr>
           <a:xfrm>
-            <a:off x="978408" y="2752344"/>
+            <a:off x="978408" y="2916936"/>
             <a:ext cx="4545940" cy="301752"/>
           </a:xfrm>
           <a:prstGeom prst="rect">
@@ -36058,7 +36031,7 @@
         </p:nvSpPr>
         <p:spPr>
           <a:xfrm>
-            <a:off x="6255868" y="1481328"/>
+            <a:off x="6255868" y="1645920"/>
             <a:ext cx="5368900" cy="1828800"/>
           </a:xfrm>
           <a:prstGeom prst="roundRect">
@@ -36085,7 +36058,7 @@
         </p:nvSpPr>
         <p:spPr>
           <a:xfrm>
-            <a:off x="6457036" y="1627632"/>
+            <a:off x="6457036" y="1792224"/>
             <a:ext cx="4966564" cy="292608"/>
           </a:xfrm>
           <a:prstGeom prst="rect">
@@ -36124,7 +36097,7 @@
         </p:nvSpPr>
         <p:spPr>
           <a:xfrm>
-            <a:off x="6475324" y="1975104"/>
+            <a:off x="6475324" y="2139696"/>
             <a:ext cx="4948276" cy="1207008"/>
           </a:xfrm>
           <a:prstGeom prst="rect">
@@ -36222,7 +36195,7 @@
         </p:nvSpPr>
         <p:spPr>
           <a:xfrm>
-            <a:off x="566928" y="3493008"/>
+            <a:off x="566928" y="3657600"/>
             <a:ext cx="11057839" cy="914400"/>
           </a:xfrm>
           <a:prstGeom prst="roundRect">
@@ -36249,7 +36222,7 @@
         </p:nvSpPr>
         <p:spPr>
           <a:xfrm>
-            <a:off x="786384" y="3602736"/>
+            <a:off x="786384" y="3767328"/>
             <a:ext cx="10618927" cy="694944"/>
           </a:xfrm>
           <a:prstGeom prst="rect">
@@ -36325,7 +36298,7 @@
         </p:nvSpPr>
         <p:spPr>
           <a:xfrm>
-            <a:off x="566928" y="4590288"/>
+            <a:off x="566928" y="4754880"/>
             <a:ext cx="11057839" cy="310896"/>
           </a:xfrm>
           <a:prstGeom prst="rect">
@@ -36707,7 +36680,7 @@
           </p:nvPr>
         </p:nvGraphicFramePr>
         <p:xfrm>
-          <a:off x="566928" y="1481328"/>
+          <a:off x="566928" y="1645920"/>
           <a:ext cx="11057839" cy="914400"/>
         </p:xfrm>
         <a:graphic>
@@ -37558,7 +37531,7 @@
         </p:nvSpPr>
         <p:spPr>
           <a:xfrm>
-            <a:off x="566928" y="3931920"/>
+            <a:off x="566928" y="4517136"/>
             <a:ext cx="11057839" cy="530352"/>
           </a:xfrm>
           <a:prstGeom prst="rect">
@@ -37706,7 +37679,7 @@
         </p:nvSpPr>
         <p:spPr>
           <a:xfrm>
-            <a:off x="566928" y="4590288"/>
+            <a:off x="566928" y="5175504"/>
             <a:ext cx="11057839" cy="868680"/>
           </a:xfrm>
           <a:prstGeom prst="roundRect">
@@ -37733,7 +37706,7 @@
         </p:nvSpPr>
         <p:spPr>
           <a:xfrm>
-            <a:off x="749808" y="4745736"/>
+            <a:off x="749808" y="5330952"/>
             <a:ext cx="566928" cy="274320"/>
           </a:xfrm>
           <a:prstGeom prst="roundRect">
@@ -37760,7 +37733,7 @@
         </p:nvSpPr>
         <p:spPr>
           <a:xfrm>
-            <a:off x="749808" y="4745736"/>
+            <a:off x="749808" y="5330952"/>
             <a:ext cx="566928" cy="274320"/>
           </a:xfrm>
           <a:prstGeom prst="rect">
@@ -37799,7 +37772,7 @@
         </p:nvSpPr>
         <p:spPr>
           <a:xfrm>
-            <a:off x="1408176" y="4709160"/>
+            <a:off x="1408176" y="5294376"/>
             <a:ext cx="10015423" cy="630936"/>
           </a:xfrm>
           <a:prstGeom prst="rect">
@@ -38136,7 +38109,7 @@
         </p:nvSpPr>
         <p:spPr>
           <a:xfrm>
-            <a:off x="566928" y="1481328"/>
+            <a:off x="566928" y="1645920"/>
             <a:ext cx="2764460" cy="566928"/>
           </a:xfrm>
           <a:prstGeom prst="rect">
@@ -38161,7 +38134,7 @@
         </p:nvSpPr>
         <p:spPr>
           <a:xfrm>
-            <a:off x="566928" y="1481328"/>
+            <a:off x="566928" y="1645920"/>
             <a:ext cx="2764460" cy="566928"/>
           </a:xfrm>
           <a:prstGeom prst="rect">
@@ -38200,7 +38173,7 @@
         </p:nvSpPr>
         <p:spPr>
           <a:xfrm>
-            <a:off x="3331388" y="1481328"/>
+            <a:off x="3331388" y="1645920"/>
             <a:ext cx="1382230" cy="566928"/>
           </a:xfrm>
           <a:prstGeom prst="rect">
@@ -38225,7 +38198,7 @@
         </p:nvSpPr>
         <p:spPr>
           <a:xfrm>
-            <a:off x="3331388" y="1481328"/>
+            <a:off x="3331388" y="1645920"/>
             <a:ext cx="1382230" cy="566928"/>
           </a:xfrm>
           <a:prstGeom prst="rect">
@@ -38264,7 +38237,7 @@
         </p:nvSpPr>
         <p:spPr>
           <a:xfrm>
-            <a:off x="4713618" y="1481328"/>
+            <a:off x="4713618" y="1645920"/>
             <a:ext cx="2764460" cy="566928"/>
           </a:xfrm>
           <a:prstGeom prst="rect">
@@ -38289,7 +38262,7 @@
         </p:nvSpPr>
         <p:spPr>
           <a:xfrm>
-            <a:off x="4713618" y="1481328"/>
+            <a:off x="4713618" y="1645920"/>
             <a:ext cx="2764460" cy="566928"/>
           </a:xfrm>
           <a:prstGeom prst="rect">
@@ -38328,7 +38301,7 @@
         </p:nvSpPr>
         <p:spPr>
           <a:xfrm>
-            <a:off x="7478078" y="1481328"/>
+            <a:off x="7478078" y="1645920"/>
             <a:ext cx="1382230" cy="566928"/>
           </a:xfrm>
           <a:prstGeom prst="rect">
@@ -38353,7 +38326,7 @@
         </p:nvSpPr>
         <p:spPr>
           <a:xfrm>
-            <a:off x="8860307" y="1481328"/>
+            <a:off x="8860307" y="1645920"/>
             <a:ext cx="2764460" cy="566928"/>
           </a:xfrm>
           <a:prstGeom prst="rect">
@@ -38378,7 +38351,7 @@
         </p:nvSpPr>
         <p:spPr>
           <a:xfrm>
-            <a:off x="8860307" y="1481328"/>
+            <a:off x="8860307" y="1645920"/>
             <a:ext cx="2764460" cy="566928"/>
           </a:xfrm>
           <a:prstGeom prst="rect">
@@ -38417,7 +38390,7 @@
         </p:nvSpPr>
         <p:spPr>
           <a:xfrm>
-            <a:off x="566928" y="2066544"/>
+            <a:off x="566928" y="2231136"/>
             <a:ext cx="548640" cy="219456"/>
           </a:xfrm>
           <a:prstGeom prst="rect">
@@ -38456,7 +38429,7 @@
         </p:nvSpPr>
         <p:spPr>
           <a:xfrm>
-            <a:off x="3057068" y="2066544"/>
+            <a:off x="3057068" y="2231136"/>
             <a:ext cx="548640" cy="219456"/>
           </a:xfrm>
           <a:prstGeom prst="rect">
@@ -38495,7 +38468,7 @@
         </p:nvSpPr>
         <p:spPr>
           <a:xfrm>
-            <a:off x="5821528" y="2066544"/>
+            <a:off x="5821528" y="2231136"/>
             <a:ext cx="548640" cy="219456"/>
           </a:xfrm>
           <a:prstGeom prst="rect">
@@ -38534,7 +38507,7 @@
         </p:nvSpPr>
         <p:spPr>
           <a:xfrm>
-            <a:off x="8585987" y="2066544"/>
+            <a:off x="8585987" y="2231136"/>
             <a:ext cx="548640" cy="219456"/>
           </a:xfrm>
           <a:prstGeom prst="rect">
@@ -38573,7 +38546,7 @@
         </p:nvSpPr>
         <p:spPr>
           <a:xfrm>
-            <a:off x="11076127" y="2066544"/>
+            <a:off x="11076127" y="2231136"/>
             <a:ext cx="548640" cy="219456"/>
           </a:xfrm>
           <a:prstGeom prst="rect">
@@ -38612,7 +38585,7 @@
         </p:nvSpPr>
         <p:spPr>
           <a:xfrm>
-            <a:off x="566928" y="2304288"/>
+            <a:off x="566928" y="2468880"/>
             <a:ext cx="11057839" cy="219456"/>
           </a:xfrm>
           <a:prstGeom prst="rect">
@@ -38651,7 +38624,7 @@
         </p:nvSpPr>
         <p:spPr>
           <a:xfrm>
-            <a:off x="566928" y="2670048"/>
+            <a:off x="566928" y="2834640"/>
             <a:ext cx="5368900" cy="1371600"/>
           </a:xfrm>
           <a:prstGeom prst="roundRect">
@@ -38678,7 +38651,7 @@
         </p:nvSpPr>
         <p:spPr>
           <a:xfrm>
-            <a:off x="768096" y="2816352"/>
+            <a:off x="768096" y="2980944"/>
             <a:ext cx="4966564" cy="292608"/>
           </a:xfrm>
           <a:prstGeom prst="rect">
@@ -38717,7 +38690,7 @@
         </p:nvSpPr>
         <p:spPr>
           <a:xfrm>
-            <a:off x="786384" y="3163824"/>
+            <a:off x="786384" y="3328416"/>
             <a:ext cx="4948276" cy="749808"/>
           </a:xfrm>
           <a:prstGeom prst="rect">
@@ -38815,7 +38788,7 @@
         </p:nvSpPr>
         <p:spPr>
           <a:xfrm>
-            <a:off x="6255868" y="2670048"/>
+            <a:off x="6255868" y="2834640"/>
             <a:ext cx="5368900" cy="1371600"/>
           </a:xfrm>
           <a:prstGeom prst="roundRect">
@@ -38842,7 +38815,7 @@
         </p:nvSpPr>
         <p:spPr>
           <a:xfrm>
-            <a:off x="6457036" y="2816352"/>
+            <a:off x="6457036" y="2980944"/>
             <a:ext cx="4966564" cy="292608"/>
           </a:xfrm>
           <a:prstGeom prst="rect">
@@ -38881,7 +38854,7 @@
         </p:nvSpPr>
         <p:spPr>
           <a:xfrm>
-            <a:off x="6475324" y="3163824"/>
+            <a:off x="6475324" y="3328416"/>
             <a:ext cx="4948276" cy="749808"/>
           </a:xfrm>
           <a:prstGeom prst="rect">
@@ -38945,7 +38918,7 @@
         </p:nvSpPr>
         <p:spPr>
           <a:xfrm>
-            <a:off x="566928" y="4224528"/>
+            <a:off x="566928" y="4389120"/>
             <a:ext cx="11057839" cy="731520"/>
           </a:xfrm>
           <a:prstGeom prst="roundRect">
@@ -38972,7 +38945,7 @@
         </p:nvSpPr>
         <p:spPr>
           <a:xfrm>
-            <a:off x="749808" y="4379976"/>
+            <a:off x="749808" y="4544568"/>
             <a:ext cx="566928" cy="274320"/>
           </a:xfrm>
           <a:prstGeom prst="roundRect">
@@ -38999,7 +38972,7 @@
         </p:nvSpPr>
         <p:spPr>
           <a:xfrm>
-            <a:off x="749808" y="4379976"/>
+            <a:off x="749808" y="4544568"/>
             <a:ext cx="566928" cy="274320"/>
           </a:xfrm>
           <a:prstGeom prst="rect">
@@ -39038,7 +39011,7 @@
         </p:nvSpPr>
         <p:spPr>
           <a:xfrm>
-            <a:off x="1408176" y="4343400"/>
+            <a:off x="1408176" y="4507992"/>
             <a:ext cx="10015423" cy="493776"/>
           </a:xfrm>
           <a:prstGeom prst="rect">
@@ -39114,7 +39087,7 @@
         </p:nvSpPr>
         <p:spPr>
           <a:xfrm>
-            <a:off x="566928" y="5102352"/>
+            <a:off x="566928" y="5266944"/>
             <a:ext cx="11057839" cy="310896"/>
           </a:xfrm>
           <a:prstGeom prst="rect">
